--- a/documentation/UI draft/travel plan PDF.pptx
+++ b/documentation/UI draft/travel plan PDF.pptx
@@ -6,6 +6,9 @@
   </p:sldMasterIdLst>
   <p:sldIdLst>
     <p:sldId id="257" r:id="rId2"/>
+    <p:sldId id="258" r:id="rId3"/>
+    <p:sldId id="259" r:id="rId4"/>
+    <p:sldId id="260" r:id="rId5"/>
   </p:sldIdLst>
   <p:sldSz cx="12192000" cy="6858000"/>
   <p:notesSz cx="6858000" cy="9144000"/>
@@ -4132,10 +4135,527 @@
           </a:prstGeom>
         </p:spPr>
       </p:pic>
+      <p:grpSp>
+        <p:nvGrpSpPr>
+          <p:cNvPr id="93" name="Group 92">
+            <a:extLst>
+              <a:ext uri="{FF2B5EF4-FFF2-40B4-BE49-F238E27FC236}">
+                <a16:creationId xmlns:a16="http://schemas.microsoft.com/office/drawing/2014/main" id="{E16F8BD7-5DC5-11EA-13C7-2BB4D25FA36E}"/>
+              </a:ext>
+            </a:extLst>
+          </p:cNvPr>
+          <p:cNvGrpSpPr/>
+          <p:nvPr/>
+        </p:nvGrpSpPr>
+        <p:grpSpPr>
+          <a:xfrm>
+            <a:off x="153005" y="231875"/>
+            <a:ext cx="11609162" cy="6781800"/>
+            <a:chOff x="0" y="0"/>
+            <a:chExt cx="11609162" cy="6781800"/>
+          </a:xfrm>
+        </p:grpSpPr>
+        <p:pic>
+          <p:nvPicPr>
+            <p:cNvPr id="94" name="Picture 93">
+              <a:extLst>
+                <a:ext uri="{FF2B5EF4-FFF2-40B4-BE49-F238E27FC236}">
+                  <a16:creationId xmlns:a16="http://schemas.microsoft.com/office/drawing/2014/main" id="{04FAA927-25BA-88C8-85DA-9372C5EE2D40}"/>
+                </a:ext>
+              </a:extLst>
+            </p:cNvPr>
+            <p:cNvPicPr>
+              <a:picLocks noChangeAspect="1"/>
+            </p:cNvPicPr>
+            <p:nvPr/>
+          </p:nvPicPr>
+          <p:blipFill>
+            <a:blip r:embed="rId2"/>
+            <a:stretch>
+              <a:fillRect/>
+            </a:stretch>
+          </p:blipFill>
+          <p:spPr>
+            <a:xfrm>
+              <a:off x="0" y="0"/>
+              <a:ext cx="11609162" cy="6781800"/>
+            </a:xfrm>
+            <a:prstGeom prst="rect">
+              <a:avLst/>
+            </a:prstGeom>
+          </p:spPr>
+        </p:pic>
+        <p:pic>
+          <p:nvPicPr>
+            <p:cNvPr id="95" name="Picture 94">
+              <a:extLst>
+                <a:ext uri="{FF2B5EF4-FFF2-40B4-BE49-F238E27FC236}">
+                  <a16:creationId xmlns:a16="http://schemas.microsoft.com/office/drawing/2014/main" id="{316814A9-EE58-3116-7B53-7FFBDAFDD6D3}"/>
+                </a:ext>
+              </a:extLst>
+            </p:cNvPr>
+            <p:cNvPicPr>
+              <a:picLocks noChangeAspect="1"/>
+            </p:cNvPicPr>
+            <p:nvPr/>
+          </p:nvPicPr>
+          <p:blipFill>
+            <a:blip r:embed="rId2"/>
+            <a:srcRect t="37300" b="61776"/>
+            <a:stretch>
+              <a:fillRect/>
+            </a:stretch>
+          </p:blipFill>
+          <p:spPr>
+            <a:xfrm>
+              <a:off x="0" y="2608545"/>
+              <a:ext cx="11609162" cy="3804781"/>
+            </a:xfrm>
+            <a:prstGeom prst="rect">
+              <a:avLst/>
+            </a:prstGeom>
+          </p:spPr>
+        </p:pic>
+      </p:grpSp>
     </p:spTree>
     <p:extLst>
       <p:ext uri="{BB962C8B-B14F-4D97-AF65-F5344CB8AC3E}">
         <p14:creationId xmlns:p14="http://schemas.microsoft.com/office/powerpoint/2010/main" val="1890454"/>
+      </p:ext>
+    </p:extLst>
+  </p:cSld>
+  <p:clrMapOvr>
+    <a:masterClrMapping/>
+  </p:clrMapOvr>
+</p:sld>
+</file>
+
+<file path=ppt/slides/slide2.xml><?xml version="1.0" encoding="utf-8"?>
+<p:sld xmlns:a="http://schemas.openxmlformats.org/drawingml/2006/main" xmlns:r="http://schemas.openxmlformats.org/officeDocument/2006/relationships" xmlns:p="http://schemas.openxmlformats.org/presentationml/2006/main">
+  <p:cSld>
+    <p:spTree>
+      <p:nvGrpSpPr>
+        <p:cNvPr id="1" name=""/>
+        <p:cNvGrpSpPr/>
+        <p:nvPr/>
+      </p:nvGrpSpPr>
+      <p:grpSpPr>
+        <a:xfrm>
+          <a:off x="0" y="0"/>
+          <a:ext cx="0" cy="0"/>
+          <a:chOff x="0" y="0"/>
+          <a:chExt cx="0" cy="0"/>
+        </a:xfrm>
+      </p:grpSpPr>
+      <p:grpSp>
+        <p:nvGrpSpPr>
+          <p:cNvPr id="2" name="Group 1">
+            <a:extLst>
+              <a:ext uri="{FF2B5EF4-FFF2-40B4-BE49-F238E27FC236}">
+                <a16:creationId xmlns:a16="http://schemas.microsoft.com/office/drawing/2014/main" id="{09FE7956-DF86-19AF-0434-901BF1370E94}"/>
+              </a:ext>
+            </a:extLst>
+          </p:cNvPr>
+          <p:cNvGrpSpPr/>
+          <p:nvPr/>
+        </p:nvGrpSpPr>
+        <p:grpSpPr>
+          <a:xfrm>
+            <a:off x="605" y="79475"/>
+            <a:ext cx="11609162" cy="6781800"/>
+            <a:chOff x="0" y="0"/>
+            <a:chExt cx="11609162" cy="6781800"/>
+          </a:xfrm>
+        </p:grpSpPr>
+        <p:pic>
+          <p:nvPicPr>
+            <p:cNvPr id="3" name="Picture 2">
+              <a:extLst>
+                <a:ext uri="{FF2B5EF4-FFF2-40B4-BE49-F238E27FC236}">
+                  <a16:creationId xmlns:a16="http://schemas.microsoft.com/office/drawing/2014/main" id="{6599A7B5-80EB-2307-5102-8F6218900E27}"/>
+                </a:ext>
+              </a:extLst>
+            </p:cNvPr>
+            <p:cNvPicPr>
+              <a:picLocks noChangeAspect="1"/>
+            </p:cNvPicPr>
+            <p:nvPr/>
+          </p:nvPicPr>
+          <p:blipFill>
+            <a:blip r:embed="rId2"/>
+            <a:stretch>
+              <a:fillRect/>
+            </a:stretch>
+          </p:blipFill>
+          <p:spPr>
+            <a:xfrm>
+              <a:off x="0" y="0"/>
+              <a:ext cx="11609162" cy="6781800"/>
+            </a:xfrm>
+            <a:prstGeom prst="rect">
+              <a:avLst/>
+            </a:prstGeom>
+          </p:spPr>
+        </p:pic>
+        <p:pic>
+          <p:nvPicPr>
+            <p:cNvPr id="4" name="Picture 3">
+              <a:extLst>
+                <a:ext uri="{FF2B5EF4-FFF2-40B4-BE49-F238E27FC236}">
+                  <a16:creationId xmlns:a16="http://schemas.microsoft.com/office/drawing/2014/main" id="{2A693FB9-51AA-6B69-2F0A-111A801B65A1}"/>
+                </a:ext>
+              </a:extLst>
+            </p:cNvPr>
+            <p:cNvPicPr>
+              <a:picLocks noChangeAspect="1"/>
+            </p:cNvPicPr>
+            <p:nvPr/>
+          </p:nvPicPr>
+          <p:blipFill>
+            <a:blip r:embed="rId2"/>
+            <a:srcRect t="37300" b="61776"/>
+            <a:stretch>
+              <a:fillRect/>
+            </a:stretch>
+          </p:blipFill>
+          <p:spPr>
+            <a:xfrm>
+              <a:off x="0" y="2608545"/>
+              <a:ext cx="11609162" cy="3804781"/>
+            </a:xfrm>
+            <a:prstGeom prst="rect">
+              <a:avLst/>
+            </a:prstGeom>
+          </p:spPr>
+        </p:pic>
+      </p:grpSp>
+      <p:pic>
+        <p:nvPicPr>
+          <p:cNvPr id="5" name="Picture 4">
+            <a:extLst>
+              <a:ext uri="{FF2B5EF4-FFF2-40B4-BE49-F238E27FC236}">
+                <a16:creationId xmlns:a16="http://schemas.microsoft.com/office/drawing/2014/main" id="{28FE1960-ED2B-48CE-1E9B-5818802E007E}"/>
+              </a:ext>
+            </a:extLst>
+          </p:cNvPr>
+          <p:cNvPicPr>
+            <a:picLocks noChangeAspect="1"/>
+          </p:cNvPicPr>
+          <p:nvPr/>
+        </p:nvPicPr>
+        <p:blipFill>
+          <a:blip r:embed="rId2"/>
+          <a:srcRect l="21278" t="20232" r="64518" b="71369"/>
+          <a:stretch>
+            <a:fillRect/>
+          </a:stretch>
+        </p:blipFill>
+        <p:spPr>
+          <a:xfrm>
+            <a:off x="1484027" y="1454048"/>
+            <a:ext cx="1648919" cy="569624"/>
+          </a:xfrm>
+          <a:prstGeom prst="rect">
+            <a:avLst/>
+          </a:prstGeom>
+        </p:spPr>
+      </p:pic>
+      <p:pic>
+        <p:nvPicPr>
+          <p:cNvPr id="6" name="Picture 5">
+            <a:extLst>
+              <a:ext uri="{FF2B5EF4-FFF2-40B4-BE49-F238E27FC236}">
+                <a16:creationId xmlns:a16="http://schemas.microsoft.com/office/drawing/2014/main" id="{0E09C033-51D9-93F2-25B2-682644C450C5}"/>
+              </a:ext>
+            </a:extLst>
+          </p:cNvPr>
+          <p:cNvPicPr>
+            <a:picLocks noChangeAspect="1"/>
+          </p:cNvPicPr>
+          <p:nvPr/>
+        </p:nvPicPr>
+        <p:blipFill>
+          <a:blip r:embed="rId2"/>
+          <a:srcRect l="35999" t="20232" r="22036" b="71368"/>
+          <a:stretch>
+            <a:fillRect/>
+          </a:stretch>
+        </p:blipFill>
+        <p:spPr>
+          <a:xfrm>
+            <a:off x="3132946" y="1454048"/>
+            <a:ext cx="4871804" cy="569624"/>
+          </a:xfrm>
+          <a:prstGeom prst="rect">
+            <a:avLst/>
+          </a:prstGeom>
+        </p:spPr>
+      </p:pic>
+      <p:pic>
+        <p:nvPicPr>
+          <p:cNvPr id="10" name="Picture 9">
+            <a:extLst>
+              <a:ext uri="{FF2B5EF4-FFF2-40B4-BE49-F238E27FC236}">
+                <a16:creationId xmlns:a16="http://schemas.microsoft.com/office/drawing/2014/main" id="{8119EB55-2EDE-7B6A-9E10-4FB52C1B8C08}"/>
+              </a:ext>
+            </a:extLst>
+          </p:cNvPr>
+          <p:cNvPicPr>
+            <a:picLocks noChangeAspect="1"/>
+          </p:cNvPicPr>
+          <p:nvPr/>
+        </p:nvPicPr>
+        <p:blipFill>
+          <a:blip r:embed="rId3"/>
+          <a:srcRect l="12122" t="41738" r="53795" b="51293"/>
+          <a:stretch>
+            <a:fillRect/>
+          </a:stretch>
+        </p:blipFill>
+        <p:spPr>
+          <a:xfrm>
+            <a:off x="625778" y="2023672"/>
+            <a:ext cx="4416443" cy="641249"/>
+          </a:xfrm>
+          <a:prstGeom prst="rect">
+            <a:avLst/>
+          </a:prstGeom>
+        </p:spPr>
+      </p:pic>
+    </p:spTree>
+    <p:extLst>
+      <p:ext uri="{BB962C8B-B14F-4D97-AF65-F5344CB8AC3E}">
+        <p14:creationId xmlns:p14="http://schemas.microsoft.com/office/powerpoint/2010/main" val="3549737439"/>
+      </p:ext>
+    </p:extLst>
+  </p:cSld>
+  <p:clrMapOvr>
+    <a:masterClrMapping/>
+  </p:clrMapOvr>
+</p:sld>
+</file>
+
+<file path=ppt/slides/slide3.xml><?xml version="1.0" encoding="utf-8"?>
+<p:sld xmlns:a="http://schemas.openxmlformats.org/drawingml/2006/main" xmlns:r="http://schemas.openxmlformats.org/officeDocument/2006/relationships" xmlns:p="http://schemas.openxmlformats.org/presentationml/2006/main">
+  <p:cSld>
+    <p:spTree>
+      <p:nvGrpSpPr>
+        <p:cNvPr id="1" name=""/>
+        <p:cNvGrpSpPr/>
+        <p:nvPr/>
+      </p:nvGrpSpPr>
+      <p:grpSpPr>
+        <a:xfrm>
+          <a:off x="0" y="0"/>
+          <a:ext cx="0" cy="0"/>
+          <a:chOff x="0" y="0"/>
+          <a:chExt cx="0" cy="0"/>
+        </a:xfrm>
+      </p:grpSpPr>
+      <p:pic>
+        <p:nvPicPr>
+          <p:cNvPr id="12" name="Picture 11">
+            <a:extLst>
+              <a:ext uri="{FF2B5EF4-FFF2-40B4-BE49-F238E27FC236}">
+                <a16:creationId xmlns:a16="http://schemas.microsoft.com/office/drawing/2014/main" id="{1FBF2946-70DC-04C0-D47D-20770266CA67}"/>
+              </a:ext>
+            </a:extLst>
+          </p:cNvPr>
+          <p:cNvPicPr>
+            <a:picLocks noChangeAspect="1"/>
+          </p:cNvPicPr>
+          <p:nvPr/>
+        </p:nvPicPr>
+        <p:blipFill>
+          <a:blip r:embed="rId2"/>
+          <a:stretch>
+            <a:fillRect/>
+          </a:stretch>
+        </p:blipFill>
+        <p:spPr>
+          <a:xfrm>
+            <a:off x="3718559" y="579116"/>
+            <a:ext cx="3648893" cy="3648893"/>
+          </a:xfrm>
+          <a:prstGeom prst="rect">
+            <a:avLst/>
+          </a:prstGeom>
+        </p:spPr>
+      </p:pic>
+      <p:pic>
+        <p:nvPicPr>
+          <p:cNvPr id="1026" name="Picture 2" descr="Business Team Silhouette PNG &amp; SVG Design For T-Shirts">
+            <a:extLst>
+              <a:ext uri="{FF2B5EF4-FFF2-40B4-BE49-F238E27FC236}">
+                <a16:creationId xmlns:a16="http://schemas.microsoft.com/office/drawing/2014/main" id="{69BDC16F-5766-BD00-7DF9-F13EBF225D57}"/>
+              </a:ext>
+            </a:extLst>
+          </p:cNvPr>
+          <p:cNvPicPr>
+            <a:picLocks noChangeAspect="1" noChangeArrowheads="1"/>
+          </p:cNvPicPr>
+          <p:nvPr/>
+        </p:nvPicPr>
+        <p:blipFill>
+          <a:blip r:embed="rId3">
+            <a:extLst>
+              <a:ext uri="{28A0092B-C50C-407E-A947-70E740481C1C}">
+                <a14:useLocalDpi xmlns:a14="http://schemas.microsoft.com/office/drawing/2010/main" val="0"/>
+              </a:ext>
+            </a:extLst>
+          </a:blip>
+          <a:srcRect/>
+          <a:stretch>
+            <a:fillRect/>
+          </a:stretch>
+        </p:blipFill>
+        <p:spPr bwMode="auto">
+          <a:xfrm>
+            <a:off x="2502261" y="1476099"/>
+            <a:ext cx="6604000" cy="6604000"/>
+          </a:xfrm>
+          <a:prstGeom prst="rect">
+            <a:avLst/>
+          </a:prstGeom>
+          <a:noFill/>
+          <a:extLst>
+            <a:ext uri="{909E8E84-426E-40DD-AFC4-6F175D3DCCD1}">
+              <a14:hiddenFill xmlns:a14="http://schemas.microsoft.com/office/drawing/2010/main">
+                <a:solidFill>
+                  <a:srgbClr val="FFFFFF"/>
+                </a:solidFill>
+              </a14:hiddenFill>
+            </a:ext>
+          </a:extLst>
+        </p:spPr>
+      </p:pic>
+    </p:spTree>
+    <p:extLst>
+      <p:ext uri="{BB962C8B-B14F-4D97-AF65-F5344CB8AC3E}">
+        <p14:creationId xmlns:p14="http://schemas.microsoft.com/office/powerpoint/2010/main" val="1047116484"/>
+      </p:ext>
+    </p:extLst>
+  </p:cSld>
+  <p:clrMapOvr>
+    <a:masterClrMapping/>
+  </p:clrMapOvr>
+</p:sld>
+</file>
+
+<file path=ppt/slides/slide4.xml><?xml version="1.0" encoding="utf-8"?>
+<p:sld xmlns:a="http://schemas.openxmlformats.org/drawingml/2006/main" xmlns:r="http://schemas.openxmlformats.org/officeDocument/2006/relationships" xmlns:p="http://schemas.openxmlformats.org/presentationml/2006/main">
+  <p:cSld>
+    <p:spTree>
+      <p:nvGrpSpPr>
+        <p:cNvPr id="1" name=""/>
+        <p:cNvGrpSpPr/>
+        <p:nvPr/>
+      </p:nvGrpSpPr>
+      <p:grpSpPr>
+        <a:xfrm>
+          <a:off x="0" y="0"/>
+          <a:ext cx="0" cy="0"/>
+          <a:chOff x="0" y="0"/>
+          <a:chExt cx="0" cy="0"/>
+        </a:xfrm>
+      </p:grpSpPr>
+      <p:pic>
+        <p:nvPicPr>
+          <p:cNvPr id="5" name="Picture 4">
+            <a:extLst>
+              <a:ext uri="{FF2B5EF4-FFF2-40B4-BE49-F238E27FC236}">
+                <a16:creationId xmlns:a16="http://schemas.microsoft.com/office/drawing/2014/main" id="{741626ED-5B0F-7E3E-5845-69F3DB53AF90}"/>
+              </a:ext>
+            </a:extLst>
+          </p:cNvPr>
+          <p:cNvPicPr>
+            <a:picLocks noChangeAspect="1"/>
+          </p:cNvPicPr>
+          <p:nvPr/>
+        </p:nvPicPr>
+        <p:blipFill>
+          <a:blip r:embed="rId2"/>
+          <a:srcRect r="65147" b="48924"/>
+          <a:stretch>
+            <a:fillRect/>
+          </a:stretch>
+        </p:blipFill>
+        <p:spPr>
+          <a:xfrm>
+            <a:off x="1105444" y="1142274"/>
+            <a:ext cx="2708910" cy="812800"/>
+          </a:xfrm>
+          <a:prstGeom prst="rect">
+            <a:avLst/>
+          </a:prstGeom>
+        </p:spPr>
+      </p:pic>
+      <p:pic>
+        <p:nvPicPr>
+          <p:cNvPr id="6" name="Picture 5">
+            <a:extLst>
+              <a:ext uri="{FF2B5EF4-FFF2-40B4-BE49-F238E27FC236}">
+                <a16:creationId xmlns:a16="http://schemas.microsoft.com/office/drawing/2014/main" id="{AA38EF25-CD86-3717-766F-EBC8245CB2A2}"/>
+              </a:ext>
+            </a:extLst>
+          </p:cNvPr>
+          <p:cNvPicPr>
+            <a:picLocks noChangeAspect="1"/>
+          </p:cNvPicPr>
+          <p:nvPr/>
+        </p:nvPicPr>
+        <p:blipFill>
+          <a:blip r:embed="rId2"/>
+          <a:srcRect l="34349" b="48924"/>
+          <a:stretch>
+            <a:fillRect/>
+          </a:stretch>
+        </p:blipFill>
+        <p:spPr>
+          <a:xfrm>
+            <a:off x="1193073" y="1955074"/>
+            <a:ext cx="5102678" cy="812800"/>
+          </a:xfrm>
+          <a:prstGeom prst="rect">
+            <a:avLst/>
+          </a:prstGeom>
+        </p:spPr>
+      </p:pic>
+      <p:pic>
+        <p:nvPicPr>
+          <p:cNvPr id="7" name="Picture 6">
+            <a:extLst>
+              <a:ext uri="{FF2B5EF4-FFF2-40B4-BE49-F238E27FC236}">
+                <a16:creationId xmlns:a16="http://schemas.microsoft.com/office/drawing/2014/main" id="{63DADBF7-68ED-FD34-60B2-9E527503BA1F}"/>
+              </a:ext>
+            </a:extLst>
+          </p:cNvPr>
+          <p:cNvPicPr>
+            <a:picLocks noChangeAspect="1"/>
+          </p:cNvPicPr>
+          <p:nvPr/>
+        </p:nvPicPr>
+        <p:blipFill>
+          <a:blip r:embed="rId2"/>
+          <a:srcRect t="48924" r="29349"/>
+          <a:stretch>
+            <a:fillRect/>
+          </a:stretch>
+        </p:blipFill>
+        <p:spPr>
+          <a:xfrm>
+            <a:off x="1105444" y="2691534"/>
+            <a:ext cx="5491299" cy="812800"/>
+          </a:xfrm>
+          <a:prstGeom prst="rect">
+            <a:avLst/>
+          </a:prstGeom>
+        </p:spPr>
+      </p:pic>
+    </p:spTree>
+    <p:extLst>
+      <p:ext uri="{BB962C8B-B14F-4D97-AF65-F5344CB8AC3E}">
+        <p14:creationId xmlns:p14="http://schemas.microsoft.com/office/powerpoint/2010/main" val="344117359"/>
       </p:ext>
     </p:extLst>
   </p:cSld>

--- a/documentation/UI draft/travel plan PDF.pptx
+++ b/documentation/UI draft/travel plan PDF.pptx
@@ -9,6 +9,8 @@
     <p:sldId id="258" r:id="rId3"/>
     <p:sldId id="259" r:id="rId4"/>
     <p:sldId id="260" r:id="rId5"/>
+    <p:sldId id="261" r:id="rId6"/>
+    <p:sldId id="262" r:id="rId7"/>
   </p:sldIdLst>
   <p:sldSz cx="12192000" cy="6858000"/>
   <p:notesSz cx="6858000" cy="9144000"/>
@@ -3306,88 +3308,6 @@
           <a:chExt cx="0" cy="0"/>
         </a:xfrm>
       </p:grpSpPr>
-      <p:grpSp>
-        <p:nvGrpSpPr>
-          <p:cNvPr id="4" name="Group 3">
-            <a:extLst>
-              <a:ext uri="{FF2B5EF4-FFF2-40B4-BE49-F238E27FC236}">
-                <a16:creationId xmlns:a16="http://schemas.microsoft.com/office/drawing/2014/main" id="{87425E97-CB3B-5DBE-3FED-C1C3BF0A8EE2}"/>
-              </a:ext>
-            </a:extLst>
-          </p:cNvPr>
-          <p:cNvGrpSpPr/>
-          <p:nvPr/>
-        </p:nvGrpSpPr>
-        <p:grpSpPr>
-          <a:xfrm>
-            <a:off x="605" y="79475"/>
-            <a:ext cx="11609162" cy="6781800"/>
-            <a:chOff x="0" y="0"/>
-            <a:chExt cx="11609162" cy="6781800"/>
-          </a:xfrm>
-        </p:grpSpPr>
-        <p:pic>
-          <p:nvPicPr>
-            <p:cNvPr id="5" name="Picture 4">
-              <a:extLst>
-                <a:ext uri="{FF2B5EF4-FFF2-40B4-BE49-F238E27FC236}">
-                  <a16:creationId xmlns:a16="http://schemas.microsoft.com/office/drawing/2014/main" id="{338C3A7E-FBAA-B4B8-77C6-D9C55C320D0C}"/>
-                </a:ext>
-              </a:extLst>
-            </p:cNvPr>
-            <p:cNvPicPr>
-              <a:picLocks noChangeAspect="1"/>
-            </p:cNvPicPr>
-            <p:nvPr/>
-          </p:nvPicPr>
-          <p:blipFill>
-            <a:blip r:embed="rId2"/>
-            <a:stretch>
-              <a:fillRect/>
-            </a:stretch>
-          </p:blipFill>
-          <p:spPr>
-            <a:xfrm>
-              <a:off x="0" y="0"/>
-              <a:ext cx="11609162" cy="6781800"/>
-            </a:xfrm>
-            <a:prstGeom prst="rect">
-              <a:avLst/>
-            </a:prstGeom>
-          </p:spPr>
-        </p:pic>
-        <p:pic>
-          <p:nvPicPr>
-            <p:cNvPr id="3" name="Picture 2">
-              <a:extLst>
-                <a:ext uri="{FF2B5EF4-FFF2-40B4-BE49-F238E27FC236}">
-                  <a16:creationId xmlns:a16="http://schemas.microsoft.com/office/drawing/2014/main" id="{614282B6-9FE6-1DE8-4099-466B6871CCC2}"/>
-                </a:ext>
-              </a:extLst>
-            </p:cNvPr>
-            <p:cNvPicPr>
-              <a:picLocks noChangeAspect="1"/>
-            </p:cNvPicPr>
-            <p:nvPr/>
-          </p:nvPicPr>
-          <p:blipFill>
-            <a:blip r:embed="rId2"/>
-            <a:srcRect t="37300" b="61776"/>
-            <a:stretch>
-              <a:fillRect/>
-            </a:stretch>
-          </p:blipFill>
-          <p:spPr>
-            <a:xfrm>
-              <a:off x="0" y="2608545"/>
-              <a:ext cx="11609162" cy="3804781"/>
-            </a:xfrm>
-            <a:prstGeom prst="rect">
-              <a:avLst/>
-            </a:prstGeom>
-          </p:spPr>
-        </p:pic>
-      </p:grpSp>
       <p:sp>
         <p:nvSpPr>
           <p:cNvPr id="6" name="Rounded Rectangle 5">
@@ -3466,7 +3386,7 @@
           <p:nvPr/>
         </p:nvPicPr>
         <p:blipFill>
-          <a:blip r:embed="rId3"/>
+          <a:blip r:embed="rId2"/>
           <a:srcRect r="43315"/>
           <a:stretch>
             <a:fillRect/>
@@ -3560,7 +3480,7 @@
           <p:nvPr/>
         </p:nvPicPr>
         <p:blipFill>
-          <a:blip r:embed="rId3"/>
+          <a:blip r:embed="rId2"/>
           <a:srcRect l="24446" r="70991" b="56084"/>
           <a:stretch>
             <a:fillRect/>
@@ -3582,6 +3502,37 @@
             <a:extLst>
               <a:ext uri="{FF2B5EF4-FFF2-40B4-BE49-F238E27FC236}">
                 <a16:creationId xmlns:a16="http://schemas.microsoft.com/office/drawing/2014/main" id="{D9DD16CE-0E27-CEB8-8724-699AB41F6223}"/>
+              </a:ext>
+            </a:extLst>
+          </p:cNvPr>
+          <p:cNvPicPr>
+            <a:picLocks noChangeAspect="1"/>
+          </p:cNvPicPr>
+          <p:nvPr/>
+        </p:nvPicPr>
+        <p:blipFill>
+          <a:blip r:embed="rId2"/>
+          <a:srcRect l="24446" r="70991" b="56084"/>
+          <a:stretch>
+            <a:fillRect/>
+          </a:stretch>
+        </p:blipFill>
+        <p:spPr>
+          <a:xfrm>
+            <a:off x="3641302" y="3145510"/>
+            <a:ext cx="354617" cy="341334"/>
+          </a:xfrm>
+          <a:prstGeom prst="rect">
+            <a:avLst/>
+          </a:prstGeom>
+        </p:spPr>
+      </p:pic>
+      <p:pic>
+        <p:nvPicPr>
+          <p:cNvPr id="13" name="Picture 12">
+            <a:extLst>
+              <a:ext uri="{FF2B5EF4-FFF2-40B4-BE49-F238E27FC236}">
+                <a16:creationId xmlns:a16="http://schemas.microsoft.com/office/drawing/2014/main" id="{B42184A2-98D5-8B86-239C-EBC00DE39B41}"/>
               </a:ext>
             </a:extLst>
           </p:cNvPr>
@@ -3592,15 +3543,15 @@
         </p:nvPicPr>
         <p:blipFill>
           <a:blip r:embed="rId3"/>
-          <a:srcRect l="24446" r="70991" b="56084"/>
+          <a:srcRect t="37903" b="58951"/>
           <a:stretch>
             <a:fillRect/>
           </a:stretch>
         </p:blipFill>
         <p:spPr>
           <a:xfrm>
-            <a:off x="3641302" y="3145510"/>
-            <a:ext cx="354617" cy="341334"/>
+            <a:off x="3690" y="2775286"/>
+            <a:ext cx="11609162" cy="213360"/>
           </a:xfrm>
           <a:prstGeom prst="rect">
             <a:avLst/>
@@ -3609,10 +3560,10 @@
       </p:pic>
       <p:pic>
         <p:nvPicPr>
-          <p:cNvPr id="13" name="Picture 12">
-            <a:extLst>
-              <a:ext uri="{FF2B5EF4-FFF2-40B4-BE49-F238E27FC236}">
-                <a16:creationId xmlns:a16="http://schemas.microsoft.com/office/drawing/2014/main" id="{B42184A2-98D5-8B86-239C-EBC00DE39B41}"/>
+          <p:cNvPr id="16" name="Picture 15">
+            <a:extLst>
+              <a:ext uri="{FF2B5EF4-FFF2-40B4-BE49-F238E27FC236}">
+                <a16:creationId xmlns:a16="http://schemas.microsoft.com/office/drawing/2014/main" id="{F93BA22C-49E0-C7A1-DB95-5891C23D3FDB}"/>
               </a:ext>
             </a:extLst>
           </p:cNvPr>
@@ -3623,15 +3574,15 @@
         </p:nvPicPr>
         <p:blipFill>
           <a:blip r:embed="rId2"/>
-          <a:srcRect t="37903" b="58951"/>
+          <a:srcRect l="28836" t="10458" r="66601" b="45626"/>
           <a:stretch>
             <a:fillRect/>
           </a:stretch>
         </p:blipFill>
         <p:spPr>
           <a:xfrm>
-            <a:off x="3690" y="2775286"/>
-            <a:ext cx="11609162" cy="213360"/>
+            <a:off x="4813909" y="3203991"/>
+            <a:ext cx="354617" cy="341334"/>
           </a:xfrm>
           <a:prstGeom prst="rect">
             <a:avLst/>
@@ -3640,10 +3591,10 @@
       </p:pic>
       <p:pic>
         <p:nvPicPr>
-          <p:cNvPr id="16" name="Picture 15">
-            <a:extLst>
-              <a:ext uri="{FF2B5EF4-FFF2-40B4-BE49-F238E27FC236}">
-                <a16:creationId xmlns:a16="http://schemas.microsoft.com/office/drawing/2014/main" id="{F93BA22C-49E0-C7A1-DB95-5891C23D3FDB}"/>
+          <p:cNvPr id="17" name="Picture 16">
+            <a:extLst>
+              <a:ext uri="{FF2B5EF4-FFF2-40B4-BE49-F238E27FC236}">
+                <a16:creationId xmlns:a16="http://schemas.microsoft.com/office/drawing/2014/main" id="{3FF91D35-7C7A-CA27-623F-CE1BC0355E0B}"/>
               </a:ext>
             </a:extLst>
           </p:cNvPr>
@@ -3653,16 +3604,16 @@
           <p:nvPr/>
         </p:nvPicPr>
         <p:blipFill>
-          <a:blip r:embed="rId3"/>
-          <a:srcRect l="28836" t="10458" r="66601" b="45626"/>
+          <a:blip r:embed="rId2"/>
+          <a:srcRect l="53455" r="6238"/>
           <a:stretch>
             <a:fillRect/>
           </a:stretch>
         </p:blipFill>
         <p:spPr>
           <a:xfrm>
-            <a:off x="4813909" y="3203991"/>
-            <a:ext cx="354617" cy="341334"/>
+            <a:off x="5004790" y="3135394"/>
+            <a:ext cx="3132799" cy="777240"/>
           </a:xfrm>
           <a:prstGeom prst="rect">
             <a:avLst/>
@@ -3671,10 +3622,10 @@
       </p:pic>
       <p:pic>
         <p:nvPicPr>
-          <p:cNvPr id="17" name="Picture 16">
-            <a:extLst>
-              <a:ext uri="{FF2B5EF4-FFF2-40B4-BE49-F238E27FC236}">
-                <a16:creationId xmlns:a16="http://schemas.microsoft.com/office/drawing/2014/main" id="{3FF91D35-7C7A-CA27-623F-CE1BC0355E0B}"/>
+          <p:cNvPr id="18" name="Picture 17">
+            <a:extLst>
+              <a:ext uri="{FF2B5EF4-FFF2-40B4-BE49-F238E27FC236}">
+                <a16:creationId xmlns:a16="http://schemas.microsoft.com/office/drawing/2014/main" id="{F8241FAE-C036-5A38-697F-9A6B71D3FE16}"/>
               </a:ext>
             </a:extLst>
           </p:cNvPr>
@@ -3684,38 +3635,7 @@
           <p:nvPr/>
         </p:nvPicPr>
         <p:blipFill>
-          <a:blip r:embed="rId3"/>
-          <a:srcRect l="53455" r="6238"/>
-          <a:stretch>
-            <a:fillRect/>
-          </a:stretch>
-        </p:blipFill>
-        <p:spPr>
-          <a:xfrm>
-            <a:off x="5004790" y="3135394"/>
-            <a:ext cx="3132799" cy="777240"/>
-          </a:xfrm>
-          <a:prstGeom prst="rect">
-            <a:avLst/>
-          </a:prstGeom>
-        </p:spPr>
-      </p:pic>
-      <p:pic>
-        <p:nvPicPr>
-          <p:cNvPr id="18" name="Picture 17">
-            <a:extLst>
-              <a:ext uri="{FF2B5EF4-FFF2-40B4-BE49-F238E27FC236}">
-                <a16:creationId xmlns:a16="http://schemas.microsoft.com/office/drawing/2014/main" id="{F8241FAE-C036-5A38-697F-9A6B71D3FE16}"/>
-              </a:ext>
-            </a:extLst>
-          </p:cNvPr>
-          <p:cNvPicPr>
-            <a:picLocks noChangeAspect="1"/>
-          </p:cNvPicPr>
-          <p:nvPr/>
-        </p:nvPicPr>
-        <p:blipFill>
-          <a:blip r:embed="rId3"/>
+          <a:blip r:embed="rId2"/>
           <a:srcRect l="93762"/>
           <a:stretch>
             <a:fillRect/>
@@ -3808,7 +3728,7 @@
           <p:nvPr/>
         </p:nvPicPr>
         <p:blipFill>
-          <a:blip r:embed="rId3"/>
+          <a:blip r:embed="rId2"/>
           <a:srcRect l="28836" t="10458" r="66601" b="45626"/>
           <a:stretch>
             <a:fillRect/>
@@ -3839,7 +3759,7 @@
           <p:nvPr/>
         </p:nvPicPr>
         <p:blipFill>
-          <a:blip r:embed="rId3"/>
+          <a:blip r:embed="rId2"/>
           <a:srcRect r="62089"/>
           <a:stretch>
             <a:fillRect/>
@@ -3933,7 +3853,7 @@
           <p:nvPr/>
         </p:nvPicPr>
         <p:blipFill>
-          <a:blip r:embed="rId3"/>
+          <a:blip r:embed="rId2"/>
           <a:srcRect l="24446" r="70991" b="56084"/>
           <a:stretch>
             <a:fillRect/>
@@ -3964,7 +3884,7 @@
           <p:nvPr/>
         </p:nvPicPr>
         <p:blipFill>
-          <a:blip r:embed="rId3"/>
+          <a:blip r:embed="rId2"/>
           <a:srcRect l="24446" r="70991" b="56084"/>
           <a:stretch>
             <a:fillRect/>
@@ -3995,7 +3915,7 @@
           <p:nvPr/>
         </p:nvPicPr>
         <p:blipFill>
-          <a:blip r:embed="rId3"/>
+          <a:blip r:embed="rId2"/>
           <a:srcRect l="28836" t="10458" r="66601" b="45626"/>
           <a:stretch>
             <a:fillRect/>
@@ -4026,7 +3946,7 @@
           <p:nvPr/>
         </p:nvPicPr>
         <p:blipFill>
-          <a:blip r:embed="rId3"/>
+          <a:blip r:embed="rId2"/>
           <a:srcRect l="53455" r="37638"/>
           <a:stretch>
             <a:fillRect/>
@@ -4057,7 +3977,7 @@
           <p:nvPr/>
         </p:nvPicPr>
         <p:blipFill>
-          <a:blip r:embed="rId3"/>
+          <a:blip r:embed="rId2"/>
           <a:srcRect l="93762"/>
           <a:stretch>
             <a:fillRect/>
@@ -4135,88 +4055,6 @@
           </a:prstGeom>
         </p:spPr>
       </p:pic>
-      <p:grpSp>
-        <p:nvGrpSpPr>
-          <p:cNvPr id="93" name="Group 92">
-            <a:extLst>
-              <a:ext uri="{FF2B5EF4-FFF2-40B4-BE49-F238E27FC236}">
-                <a16:creationId xmlns:a16="http://schemas.microsoft.com/office/drawing/2014/main" id="{E16F8BD7-5DC5-11EA-13C7-2BB4D25FA36E}"/>
-              </a:ext>
-            </a:extLst>
-          </p:cNvPr>
-          <p:cNvGrpSpPr/>
-          <p:nvPr/>
-        </p:nvGrpSpPr>
-        <p:grpSpPr>
-          <a:xfrm>
-            <a:off x="153005" y="231875"/>
-            <a:ext cx="11609162" cy="6781800"/>
-            <a:chOff x="0" y="0"/>
-            <a:chExt cx="11609162" cy="6781800"/>
-          </a:xfrm>
-        </p:grpSpPr>
-        <p:pic>
-          <p:nvPicPr>
-            <p:cNvPr id="94" name="Picture 93">
-              <a:extLst>
-                <a:ext uri="{FF2B5EF4-FFF2-40B4-BE49-F238E27FC236}">
-                  <a16:creationId xmlns:a16="http://schemas.microsoft.com/office/drawing/2014/main" id="{04FAA927-25BA-88C8-85DA-9372C5EE2D40}"/>
-                </a:ext>
-              </a:extLst>
-            </p:cNvPr>
-            <p:cNvPicPr>
-              <a:picLocks noChangeAspect="1"/>
-            </p:cNvPicPr>
-            <p:nvPr/>
-          </p:nvPicPr>
-          <p:blipFill>
-            <a:blip r:embed="rId2"/>
-            <a:stretch>
-              <a:fillRect/>
-            </a:stretch>
-          </p:blipFill>
-          <p:spPr>
-            <a:xfrm>
-              <a:off x="0" y="0"/>
-              <a:ext cx="11609162" cy="6781800"/>
-            </a:xfrm>
-            <a:prstGeom prst="rect">
-              <a:avLst/>
-            </a:prstGeom>
-          </p:spPr>
-        </p:pic>
-        <p:pic>
-          <p:nvPicPr>
-            <p:cNvPr id="95" name="Picture 94">
-              <a:extLst>
-                <a:ext uri="{FF2B5EF4-FFF2-40B4-BE49-F238E27FC236}">
-                  <a16:creationId xmlns:a16="http://schemas.microsoft.com/office/drawing/2014/main" id="{316814A9-EE58-3116-7B53-7FFBDAFDD6D3}"/>
-                </a:ext>
-              </a:extLst>
-            </p:cNvPr>
-            <p:cNvPicPr>
-              <a:picLocks noChangeAspect="1"/>
-            </p:cNvPicPr>
-            <p:nvPr/>
-          </p:nvPicPr>
-          <p:blipFill>
-            <a:blip r:embed="rId2"/>
-            <a:srcRect t="37300" b="61776"/>
-            <a:stretch>
-              <a:fillRect/>
-            </a:stretch>
-          </p:blipFill>
-          <p:spPr>
-            <a:xfrm>
-              <a:off x="0" y="2608545"/>
-              <a:ext cx="11609162" cy="3804781"/>
-            </a:xfrm>
-            <a:prstGeom prst="rect">
-              <a:avLst/>
-            </a:prstGeom>
-          </p:spPr>
-        </p:pic>
-      </p:grpSp>
     </p:spTree>
     <p:extLst>
       <p:ext uri="{BB962C8B-B14F-4D97-AF65-F5344CB8AC3E}">
@@ -4656,6 +4494,188 @@
     <p:extLst>
       <p:ext uri="{BB962C8B-B14F-4D97-AF65-F5344CB8AC3E}">
         <p14:creationId xmlns:p14="http://schemas.microsoft.com/office/powerpoint/2010/main" val="344117359"/>
+      </p:ext>
+    </p:extLst>
+  </p:cSld>
+  <p:clrMapOvr>
+    <a:masterClrMapping/>
+  </p:clrMapOvr>
+</p:sld>
+</file>
+
+<file path=ppt/slides/slide5.xml><?xml version="1.0" encoding="utf-8"?>
+<p:sld xmlns:a="http://schemas.openxmlformats.org/drawingml/2006/main" xmlns:r="http://schemas.openxmlformats.org/officeDocument/2006/relationships" xmlns:p="http://schemas.openxmlformats.org/presentationml/2006/main">
+  <p:cSld>
+    <p:spTree>
+      <p:nvGrpSpPr>
+        <p:cNvPr id="1" name=""/>
+        <p:cNvGrpSpPr/>
+        <p:nvPr/>
+      </p:nvGrpSpPr>
+      <p:grpSpPr>
+        <a:xfrm>
+          <a:off x="0" y="0"/>
+          <a:ext cx="0" cy="0"/>
+          <a:chOff x="0" y="0"/>
+          <a:chExt cx="0" cy="0"/>
+        </a:xfrm>
+      </p:grpSpPr>
+      <p:pic>
+        <p:nvPicPr>
+          <p:cNvPr id="4" name="Picture 3">
+            <a:extLst>
+              <a:ext uri="{FF2B5EF4-FFF2-40B4-BE49-F238E27FC236}">
+                <a16:creationId xmlns:a16="http://schemas.microsoft.com/office/drawing/2014/main" id="{811804B1-CBFD-B27A-4E57-3AC5C3A0BD05}"/>
+              </a:ext>
+            </a:extLst>
+          </p:cNvPr>
+          <p:cNvPicPr>
+            <a:picLocks noChangeAspect="1"/>
+          </p:cNvPicPr>
+          <p:nvPr/>
+        </p:nvPicPr>
+        <p:blipFill>
+          <a:blip r:embed="rId2"/>
+          <a:srcRect b="61181"/>
+          <a:stretch>
+            <a:fillRect/>
+          </a:stretch>
+        </p:blipFill>
+        <p:spPr>
+          <a:xfrm>
+            <a:off x="0" y="87087"/>
+            <a:ext cx="10337074" cy="2760616"/>
+          </a:xfrm>
+          <a:prstGeom prst="rect">
+            <a:avLst/>
+          </a:prstGeom>
+        </p:spPr>
+      </p:pic>
+      <p:pic>
+        <p:nvPicPr>
+          <p:cNvPr id="27" name="Picture 26">
+            <a:extLst>
+              <a:ext uri="{FF2B5EF4-FFF2-40B4-BE49-F238E27FC236}">
+                <a16:creationId xmlns:a16="http://schemas.microsoft.com/office/drawing/2014/main" id="{8B654AA4-B14E-697A-68FA-60AEA1E389FA}"/>
+              </a:ext>
+            </a:extLst>
+          </p:cNvPr>
+          <p:cNvPicPr>
+            <a:picLocks noChangeAspect="1"/>
+          </p:cNvPicPr>
+          <p:nvPr/>
+        </p:nvPicPr>
+        <p:blipFill>
+          <a:blip r:embed="rId2"/>
+          <a:srcRect t="35941" b="62835"/>
+          <a:stretch>
+            <a:fillRect/>
+          </a:stretch>
+        </p:blipFill>
+        <p:spPr>
+          <a:xfrm>
+            <a:off x="0" y="2708366"/>
+            <a:ext cx="10337074" cy="4149634"/>
+          </a:xfrm>
+          <a:prstGeom prst="rect">
+            <a:avLst/>
+          </a:prstGeom>
+        </p:spPr>
+      </p:pic>
+      <p:pic>
+        <p:nvPicPr>
+          <p:cNvPr id="28" name="Picture 27">
+            <a:extLst>
+              <a:ext uri="{FF2B5EF4-FFF2-40B4-BE49-F238E27FC236}">
+                <a16:creationId xmlns:a16="http://schemas.microsoft.com/office/drawing/2014/main" id="{C8C70A9A-39DD-74AF-48CE-D17B34792644}"/>
+              </a:ext>
+            </a:extLst>
+          </p:cNvPr>
+          <p:cNvPicPr>
+            <a:picLocks noChangeAspect="1"/>
+          </p:cNvPicPr>
+          <p:nvPr/>
+        </p:nvPicPr>
+        <p:blipFill>
+          <a:blip r:embed="rId3"/>
+          <a:stretch>
+            <a:fillRect/>
+          </a:stretch>
+        </p:blipFill>
+        <p:spPr>
+          <a:xfrm>
+            <a:off x="234855" y="2847704"/>
+            <a:ext cx="10555066" cy="3022324"/>
+          </a:xfrm>
+          <a:prstGeom prst="rect">
+            <a:avLst/>
+          </a:prstGeom>
+        </p:spPr>
+      </p:pic>
+    </p:spTree>
+    <p:extLst>
+      <p:ext uri="{BB962C8B-B14F-4D97-AF65-F5344CB8AC3E}">
+        <p14:creationId xmlns:p14="http://schemas.microsoft.com/office/powerpoint/2010/main" val="1661489440"/>
+      </p:ext>
+    </p:extLst>
+  </p:cSld>
+  <p:clrMapOvr>
+    <a:masterClrMapping/>
+  </p:clrMapOvr>
+</p:sld>
+</file>
+
+<file path=ppt/slides/slide6.xml><?xml version="1.0" encoding="utf-8"?>
+<p:sld xmlns:a="http://schemas.openxmlformats.org/drawingml/2006/main" xmlns:r="http://schemas.openxmlformats.org/officeDocument/2006/relationships" xmlns:p="http://schemas.openxmlformats.org/presentationml/2006/main">
+  <p:cSld>
+    <p:spTree>
+      <p:nvGrpSpPr>
+        <p:cNvPr id="1" name=""/>
+        <p:cNvGrpSpPr/>
+        <p:nvPr/>
+      </p:nvGrpSpPr>
+      <p:grpSpPr>
+        <a:xfrm>
+          <a:off x="0" y="0"/>
+          <a:ext cx="0" cy="0"/>
+          <a:chOff x="0" y="0"/>
+          <a:chExt cx="0" cy="0"/>
+        </a:xfrm>
+      </p:grpSpPr>
+      <p:pic>
+        <p:nvPicPr>
+          <p:cNvPr id="23" name="Picture 22">
+            <a:extLst>
+              <a:ext uri="{FF2B5EF4-FFF2-40B4-BE49-F238E27FC236}">
+                <a16:creationId xmlns:a16="http://schemas.microsoft.com/office/drawing/2014/main" id="{A82FD9FB-7BA9-CBF2-833E-9513CED88FBC}"/>
+              </a:ext>
+            </a:extLst>
+          </p:cNvPr>
+          <p:cNvPicPr>
+            <a:picLocks noChangeAspect="1"/>
+          </p:cNvPicPr>
+          <p:nvPr/>
+        </p:nvPicPr>
+        <p:blipFill>
+          <a:blip r:embed="rId2"/>
+          <a:stretch>
+            <a:fillRect/>
+          </a:stretch>
+        </p:blipFill>
+        <p:spPr>
+          <a:xfrm>
+            <a:off x="1079589" y="1863634"/>
+            <a:ext cx="10235022" cy="2930683"/>
+          </a:xfrm>
+          <a:prstGeom prst="rect">
+            <a:avLst/>
+          </a:prstGeom>
+        </p:spPr>
+      </p:pic>
+    </p:spTree>
+    <p:extLst>
+      <p:ext uri="{BB962C8B-B14F-4D97-AF65-F5344CB8AC3E}">
+        <p14:creationId xmlns:p14="http://schemas.microsoft.com/office/powerpoint/2010/main" val="4225028816"/>
       </p:ext>
     </p:extLst>
   </p:cSld>

--- a/documentation/UI draft/travel plan PDF.pptx
+++ b/documentation/UI draft/travel plan PDF.pptx
@@ -11,6 +11,7 @@
     <p:sldId id="260" r:id="rId5"/>
     <p:sldId id="261" r:id="rId6"/>
     <p:sldId id="262" r:id="rId7"/>
+    <p:sldId id="263" r:id="rId8"/>
   </p:sldIdLst>
   <p:sldSz cx="12192000" cy="6858000"/>
   <p:notesSz cx="6858000" cy="9144000"/>
@@ -109,6 +110,11 @@
       </a:defRPr>
     </a:lvl9pPr>
   </p:defaultTextStyle>
+  <p:extLst>
+    <p:ext uri="{EFAFB233-063F-42B5-8137-9DF3F51BA10A}">
+      <p15:sldGuideLst xmlns:p15="http://schemas.microsoft.com/office/powerpoint/2012/main"/>
+    </p:ext>
+  </p:extLst>
 </p:presentation>
 </file>
 
@@ -258,7 +264,7 @@
           <a:lstStyle/>
           <a:p>
             <a:fld id="{14B88924-AB55-9E44-A2A4-FA1EF06ADD5B}" type="datetimeFigureOut">
-              <a:t>3/30/26</a:t>
+              <a:t>4/1/26</a:t>
             </a:fld>
             <a:endParaRPr lang="en-US"/>
           </a:p>
@@ -454,7 +460,7 @@
           <a:lstStyle/>
           <a:p>
             <a:fld id="{14B88924-AB55-9E44-A2A4-FA1EF06ADD5B}" type="datetimeFigureOut">
-              <a:t>3/30/26</a:t>
+              <a:t>4/1/26</a:t>
             </a:fld>
             <a:endParaRPr lang="en-US"/>
           </a:p>
@@ -660,7 +666,7 @@
           <a:lstStyle/>
           <a:p>
             <a:fld id="{14B88924-AB55-9E44-A2A4-FA1EF06ADD5B}" type="datetimeFigureOut">
-              <a:t>3/30/26</a:t>
+              <a:t>4/1/26</a:t>
             </a:fld>
             <a:endParaRPr lang="en-US"/>
           </a:p>
@@ -856,7 +862,7 @@
           <a:lstStyle/>
           <a:p>
             <a:fld id="{14B88924-AB55-9E44-A2A4-FA1EF06ADD5B}" type="datetimeFigureOut">
-              <a:t>3/30/26</a:t>
+              <a:t>4/1/26</a:t>
             </a:fld>
             <a:endParaRPr lang="en-US"/>
           </a:p>
@@ -1129,7 +1135,7 @@
           <a:lstStyle/>
           <a:p>
             <a:fld id="{14B88924-AB55-9E44-A2A4-FA1EF06ADD5B}" type="datetimeFigureOut">
-              <a:t>3/30/26</a:t>
+              <a:t>4/1/26</a:t>
             </a:fld>
             <a:endParaRPr lang="en-US"/>
           </a:p>
@@ -1392,7 +1398,7 @@
           <a:lstStyle/>
           <a:p>
             <a:fld id="{14B88924-AB55-9E44-A2A4-FA1EF06ADD5B}" type="datetimeFigureOut">
-              <a:t>3/30/26</a:t>
+              <a:t>4/1/26</a:t>
             </a:fld>
             <a:endParaRPr lang="en-US"/>
           </a:p>
@@ -1802,7 +1808,7 @@
           <a:lstStyle/>
           <a:p>
             <a:fld id="{14B88924-AB55-9E44-A2A4-FA1EF06ADD5B}" type="datetimeFigureOut">
-              <a:t>3/30/26</a:t>
+              <a:t>4/1/26</a:t>
             </a:fld>
             <a:endParaRPr lang="en-US"/>
           </a:p>
@@ -1941,7 +1947,7 @@
           <a:lstStyle/>
           <a:p>
             <a:fld id="{14B88924-AB55-9E44-A2A4-FA1EF06ADD5B}" type="datetimeFigureOut">
-              <a:t>3/30/26</a:t>
+              <a:t>4/1/26</a:t>
             </a:fld>
             <a:endParaRPr lang="en-US"/>
           </a:p>
@@ -2052,7 +2058,7 @@
           <a:lstStyle/>
           <a:p>
             <a:fld id="{14B88924-AB55-9E44-A2A4-FA1EF06ADD5B}" type="datetimeFigureOut">
-              <a:t>3/30/26</a:t>
+              <a:t>4/1/26</a:t>
             </a:fld>
             <a:endParaRPr lang="en-US"/>
           </a:p>
@@ -2361,7 +2367,7 @@
           <a:lstStyle/>
           <a:p>
             <a:fld id="{14B88924-AB55-9E44-A2A4-FA1EF06ADD5B}" type="datetimeFigureOut">
-              <a:t>3/30/26</a:t>
+              <a:t>4/1/26</a:t>
             </a:fld>
             <a:endParaRPr lang="en-US"/>
           </a:p>
@@ -2647,7 +2653,7 @@
           <a:lstStyle/>
           <a:p>
             <a:fld id="{14B88924-AB55-9E44-A2A4-FA1EF06ADD5B}" type="datetimeFigureOut">
-              <a:t>3/30/26</a:t>
+              <a:t>4/1/26</a:t>
             </a:fld>
             <a:endParaRPr lang="en-US"/>
           </a:p>
@@ -2886,7 +2892,7 @@
           </a:lstStyle>
           <a:p>
             <a:fld id="{14B88924-AB55-9E44-A2A4-FA1EF06ADD5B}" type="datetimeFigureOut">
-              <a:t>3/30/26</a:t>
+              <a:t>4/1/26</a:t>
             </a:fld>
             <a:endParaRPr lang="en-US"/>
           </a:p>
@@ -4685,6 +4691,128 @@
 </p:sld>
 </file>
 
+<file path=ppt/slides/slide7.xml><?xml version="1.0" encoding="utf-8"?>
+<p:sld xmlns:a="http://schemas.openxmlformats.org/drawingml/2006/main" xmlns:r="http://schemas.openxmlformats.org/officeDocument/2006/relationships" xmlns:p="http://schemas.openxmlformats.org/presentationml/2006/main">
+  <p:cSld>
+    <p:spTree>
+      <p:nvGrpSpPr>
+        <p:cNvPr id="1" name=""/>
+        <p:cNvGrpSpPr/>
+        <p:nvPr/>
+      </p:nvGrpSpPr>
+      <p:grpSpPr>
+        <a:xfrm>
+          <a:off x="0" y="0"/>
+          <a:ext cx="0" cy="0"/>
+          <a:chOff x="0" y="0"/>
+          <a:chExt cx="0" cy="0"/>
+        </a:xfrm>
+      </p:grpSpPr>
+      <p:pic>
+        <p:nvPicPr>
+          <p:cNvPr id="6" name="Picture 5">
+            <a:extLst>
+              <a:ext uri="{FF2B5EF4-FFF2-40B4-BE49-F238E27FC236}">
+                <a16:creationId xmlns:a16="http://schemas.microsoft.com/office/drawing/2014/main" id="{D018AEA6-3978-2529-5501-32A12C196B5E}"/>
+              </a:ext>
+            </a:extLst>
+          </p:cNvPr>
+          <p:cNvPicPr>
+            <a:picLocks noChangeAspect="1"/>
+          </p:cNvPicPr>
+          <p:nvPr/>
+        </p:nvPicPr>
+        <p:blipFill>
+          <a:blip r:embed="rId2"/>
+          <a:srcRect l="25781" t="55714" r="41006" b="26820"/>
+          <a:stretch>
+            <a:fillRect/>
+          </a:stretch>
+        </p:blipFill>
+        <p:spPr>
+          <a:xfrm>
+            <a:off x="4184527" y="4689176"/>
+            <a:ext cx="2587925" cy="560717"/>
+          </a:xfrm>
+          <a:prstGeom prst="rect">
+            <a:avLst/>
+          </a:prstGeom>
+        </p:spPr>
+      </p:pic>
+      <p:pic>
+        <p:nvPicPr>
+          <p:cNvPr id="3" name="Picture 2">
+            <a:extLst>
+              <a:ext uri="{FF2B5EF4-FFF2-40B4-BE49-F238E27FC236}">
+                <a16:creationId xmlns:a16="http://schemas.microsoft.com/office/drawing/2014/main" id="{45CDE54A-B989-2754-E5B1-56B2A86792AB}"/>
+              </a:ext>
+            </a:extLst>
+          </p:cNvPr>
+          <p:cNvPicPr>
+            <a:picLocks noChangeAspect="1"/>
+          </p:cNvPicPr>
+          <p:nvPr/>
+        </p:nvPicPr>
+        <p:blipFill>
+          <a:blip r:embed="rId3"/>
+          <a:stretch>
+            <a:fillRect/>
+          </a:stretch>
+        </p:blipFill>
+        <p:spPr>
+          <a:xfrm>
+            <a:off x="3692105" y="258793"/>
+            <a:ext cx="3572774" cy="3572774"/>
+          </a:xfrm>
+          <a:prstGeom prst="rect">
+            <a:avLst/>
+          </a:prstGeom>
+        </p:spPr>
+      </p:pic>
+      <p:pic>
+        <p:nvPicPr>
+          <p:cNvPr id="5" name="Picture 4">
+            <a:extLst>
+              <a:ext uri="{FF2B5EF4-FFF2-40B4-BE49-F238E27FC236}">
+                <a16:creationId xmlns:a16="http://schemas.microsoft.com/office/drawing/2014/main" id="{18714410-467D-9F93-3048-2C36DDAC5638}"/>
+              </a:ext>
+            </a:extLst>
+          </p:cNvPr>
+          <p:cNvPicPr>
+            <a:picLocks noChangeAspect="1"/>
+          </p:cNvPicPr>
+          <p:nvPr/>
+        </p:nvPicPr>
+        <p:blipFill>
+          <a:blip r:embed="rId2"/>
+          <a:srcRect l="24969" t="34145" r="1740" b="43045"/>
+          <a:stretch>
+            <a:fillRect/>
+          </a:stretch>
+        </p:blipFill>
+        <p:spPr>
+          <a:xfrm>
+            <a:off x="2047308" y="3933645"/>
+            <a:ext cx="6862364" cy="879895"/>
+          </a:xfrm>
+          <a:prstGeom prst="rect">
+            <a:avLst/>
+          </a:prstGeom>
+        </p:spPr>
+      </p:pic>
+    </p:spTree>
+    <p:extLst>
+      <p:ext uri="{BB962C8B-B14F-4D97-AF65-F5344CB8AC3E}">
+        <p14:creationId xmlns:p14="http://schemas.microsoft.com/office/powerpoint/2010/main" val="1651973900"/>
+      </p:ext>
+    </p:extLst>
+  </p:cSld>
+  <p:clrMapOvr>
+    <a:masterClrMapping/>
+  </p:clrMapOvr>
+</p:sld>
+</file>
+
 <file path=ppt/theme/theme1.xml><?xml version="1.0" encoding="utf-8"?>
 <a:theme xmlns:a="http://schemas.openxmlformats.org/drawingml/2006/main" name="Office Theme">
   <a:themeElements>

--- a/documentation/UI draft/travel plan PDF.pptx
+++ b/documentation/UI draft/travel plan PDF.pptx
@@ -12,6 +12,8 @@
     <p:sldId id="261" r:id="rId6"/>
     <p:sldId id="262" r:id="rId7"/>
     <p:sldId id="263" r:id="rId8"/>
+    <p:sldId id="264" r:id="rId9"/>
+    <p:sldId id="265" r:id="rId10"/>
   </p:sldIdLst>
   <p:sldSz cx="12192000" cy="6858000"/>
   <p:notesSz cx="6858000" cy="9144000"/>
@@ -264,7 +266,7 @@
           <a:lstStyle/>
           <a:p>
             <a:fld id="{14B88924-AB55-9E44-A2A4-FA1EF06ADD5B}" type="datetimeFigureOut">
-              <a:t>4/1/26</a:t>
+              <a:t>4/12/26</a:t>
             </a:fld>
             <a:endParaRPr lang="en-US"/>
           </a:p>
@@ -460,7 +462,7 @@
           <a:lstStyle/>
           <a:p>
             <a:fld id="{14B88924-AB55-9E44-A2A4-FA1EF06ADD5B}" type="datetimeFigureOut">
-              <a:t>4/1/26</a:t>
+              <a:t>4/12/26</a:t>
             </a:fld>
             <a:endParaRPr lang="en-US"/>
           </a:p>
@@ -666,7 +668,7 @@
           <a:lstStyle/>
           <a:p>
             <a:fld id="{14B88924-AB55-9E44-A2A4-FA1EF06ADD5B}" type="datetimeFigureOut">
-              <a:t>4/1/26</a:t>
+              <a:t>4/12/26</a:t>
             </a:fld>
             <a:endParaRPr lang="en-US"/>
           </a:p>
@@ -862,7 +864,7 @@
           <a:lstStyle/>
           <a:p>
             <a:fld id="{14B88924-AB55-9E44-A2A4-FA1EF06ADD5B}" type="datetimeFigureOut">
-              <a:t>4/1/26</a:t>
+              <a:t>4/12/26</a:t>
             </a:fld>
             <a:endParaRPr lang="en-US"/>
           </a:p>
@@ -1135,7 +1137,7 @@
           <a:lstStyle/>
           <a:p>
             <a:fld id="{14B88924-AB55-9E44-A2A4-FA1EF06ADD5B}" type="datetimeFigureOut">
-              <a:t>4/1/26</a:t>
+              <a:t>4/12/26</a:t>
             </a:fld>
             <a:endParaRPr lang="en-US"/>
           </a:p>
@@ -1398,7 +1400,7 @@
           <a:lstStyle/>
           <a:p>
             <a:fld id="{14B88924-AB55-9E44-A2A4-FA1EF06ADD5B}" type="datetimeFigureOut">
-              <a:t>4/1/26</a:t>
+              <a:t>4/12/26</a:t>
             </a:fld>
             <a:endParaRPr lang="en-US"/>
           </a:p>
@@ -1808,7 +1810,7 @@
           <a:lstStyle/>
           <a:p>
             <a:fld id="{14B88924-AB55-9E44-A2A4-FA1EF06ADD5B}" type="datetimeFigureOut">
-              <a:t>4/1/26</a:t>
+              <a:t>4/12/26</a:t>
             </a:fld>
             <a:endParaRPr lang="en-US"/>
           </a:p>
@@ -1947,7 +1949,7 @@
           <a:lstStyle/>
           <a:p>
             <a:fld id="{14B88924-AB55-9E44-A2A4-FA1EF06ADD5B}" type="datetimeFigureOut">
-              <a:t>4/1/26</a:t>
+              <a:t>4/12/26</a:t>
             </a:fld>
             <a:endParaRPr lang="en-US"/>
           </a:p>
@@ -2058,7 +2060,7 @@
           <a:lstStyle/>
           <a:p>
             <a:fld id="{14B88924-AB55-9E44-A2A4-FA1EF06ADD5B}" type="datetimeFigureOut">
-              <a:t>4/1/26</a:t>
+              <a:t>4/12/26</a:t>
             </a:fld>
             <a:endParaRPr lang="en-US"/>
           </a:p>
@@ -2367,7 +2369,7 @@
           <a:lstStyle/>
           <a:p>
             <a:fld id="{14B88924-AB55-9E44-A2A4-FA1EF06ADD5B}" type="datetimeFigureOut">
-              <a:t>4/1/26</a:t>
+              <a:t>4/12/26</a:t>
             </a:fld>
             <a:endParaRPr lang="en-US"/>
           </a:p>
@@ -2653,7 +2655,7 @@
           <a:lstStyle/>
           <a:p>
             <a:fld id="{14B88924-AB55-9E44-A2A4-FA1EF06ADD5B}" type="datetimeFigureOut">
-              <a:t>4/1/26</a:t>
+              <a:t>4/12/26</a:t>
             </a:fld>
             <a:endParaRPr lang="en-US"/>
           </a:p>
@@ -2892,7 +2894,7 @@
           </a:lstStyle>
           <a:p>
             <a:fld id="{14B88924-AB55-9E44-A2A4-FA1EF06ADD5B}" type="datetimeFigureOut">
-              <a:t>4/1/26</a:t>
+              <a:t>4/12/26</a:t>
             </a:fld>
             <a:endParaRPr lang="en-US"/>
           </a:p>
@@ -4813,6 +4815,650 @@
 </p:sld>
 </file>
 
+<file path=ppt/slides/slide8.xml><?xml version="1.0" encoding="utf-8"?>
+<p:sld xmlns:a="http://schemas.openxmlformats.org/drawingml/2006/main" xmlns:r="http://schemas.openxmlformats.org/officeDocument/2006/relationships" xmlns:p="http://schemas.openxmlformats.org/presentationml/2006/main">
+  <p:cSld>
+    <p:spTree>
+      <p:nvGrpSpPr>
+        <p:cNvPr id="1" name=""/>
+        <p:cNvGrpSpPr/>
+        <p:nvPr/>
+      </p:nvGrpSpPr>
+      <p:grpSpPr>
+        <a:xfrm>
+          <a:off x="0" y="0"/>
+          <a:ext cx="0" cy="0"/>
+          <a:chOff x="0" y="0"/>
+          <a:chExt cx="0" cy="0"/>
+        </a:xfrm>
+      </p:grpSpPr>
+      <p:pic>
+        <p:nvPicPr>
+          <p:cNvPr id="3" name="Picture 2">
+            <a:extLst>
+              <a:ext uri="{FF2B5EF4-FFF2-40B4-BE49-F238E27FC236}">
+                <a16:creationId xmlns:a16="http://schemas.microsoft.com/office/drawing/2014/main" id="{4DE993C2-24CF-BA90-4E37-38DCB04C3FE5}"/>
+              </a:ext>
+            </a:extLst>
+          </p:cNvPr>
+          <p:cNvPicPr>
+            <a:picLocks noChangeAspect="1"/>
+          </p:cNvPicPr>
+          <p:nvPr/>
+        </p:nvPicPr>
+        <p:blipFill>
+          <a:blip r:embed="rId2"/>
+          <a:stretch>
+            <a:fillRect/>
+          </a:stretch>
+        </p:blipFill>
+        <p:spPr>
+          <a:xfrm>
+            <a:off x="717550" y="679450"/>
+            <a:ext cx="7772400" cy="3973375"/>
+          </a:xfrm>
+          <a:prstGeom prst="rect">
+            <a:avLst/>
+          </a:prstGeom>
+        </p:spPr>
+      </p:pic>
+      <p:sp>
+        <p:nvSpPr>
+          <p:cNvPr id="4" name="Rectangle 3">
+            <a:extLst>
+              <a:ext uri="{FF2B5EF4-FFF2-40B4-BE49-F238E27FC236}">
+                <a16:creationId xmlns:a16="http://schemas.microsoft.com/office/drawing/2014/main" id="{CB9B736A-73B7-40F1-E427-2871A4A8D1C2}"/>
+              </a:ext>
+            </a:extLst>
+          </p:cNvPr>
+          <p:cNvSpPr/>
+          <p:nvPr/>
+        </p:nvSpPr>
+        <p:spPr>
+          <a:xfrm>
+            <a:off x="517584" y="431321"/>
+            <a:ext cx="8376249" cy="3191773"/>
+          </a:xfrm>
+          <a:prstGeom prst="rect">
+            <a:avLst/>
+          </a:prstGeom>
+          <a:solidFill>
+            <a:schemeClr val="bg1"/>
+          </a:solidFill>
+          <a:ln>
+            <a:noFill/>
+          </a:ln>
+        </p:spPr>
+        <p:style>
+          <a:lnRef idx="2">
+            <a:schemeClr val="accent1">
+              <a:shade val="15000"/>
+            </a:schemeClr>
+          </a:lnRef>
+          <a:fillRef idx="1">
+            <a:schemeClr val="accent1"/>
+          </a:fillRef>
+          <a:effectRef idx="0">
+            <a:schemeClr val="accent1"/>
+          </a:effectRef>
+          <a:fontRef idx="minor">
+            <a:schemeClr val="lt1"/>
+          </a:fontRef>
+        </p:style>
+        <p:txBody>
+          <a:bodyPr rtlCol="0" anchor="ctr"/>
+          <a:lstStyle/>
+          <a:p>
+            <a:pPr algn="ctr"/>
+            <a:endParaRPr lang="en-US"/>
+          </a:p>
+        </p:txBody>
+      </p:sp>
+      <p:sp>
+        <p:nvSpPr>
+          <p:cNvPr id="5" name="Rounded Rectangle 4">
+            <a:extLst>
+              <a:ext uri="{FF2B5EF4-FFF2-40B4-BE49-F238E27FC236}">
+                <a16:creationId xmlns:a16="http://schemas.microsoft.com/office/drawing/2014/main" id="{CEED9622-00A2-707C-1584-BD5CC0034DAA}"/>
+              </a:ext>
+            </a:extLst>
+          </p:cNvPr>
+          <p:cNvSpPr/>
+          <p:nvPr/>
+        </p:nvSpPr>
+        <p:spPr>
+          <a:xfrm>
+            <a:off x="854015" y="2932981"/>
+            <a:ext cx="1164566" cy="284672"/>
+          </a:xfrm>
+          <a:prstGeom prst="roundRect">
+            <a:avLst>
+              <a:gd name="adj" fmla="val 40910"/>
+            </a:avLst>
+          </a:prstGeom>
+          <a:solidFill>
+            <a:schemeClr val="accent1">
+              <a:lumMod val="60000"/>
+              <a:lumOff val="40000"/>
+            </a:schemeClr>
+          </a:solidFill>
+          <a:ln>
+            <a:noFill/>
+          </a:ln>
+        </p:spPr>
+        <p:style>
+          <a:lnRef idx="2">
+            <a:schemeClr val="accent1">
+              <a:shade val="15000"/>
+            </a:schemeClr>
+          </a:lnRef>
+          <a:fillRef idx="1">
+            <a:schemeClr val="accent1"/>
+          </a:fillRef>
+          <a:effectRef idx="0">
+            <a:schemeClr val="accent1"/>
+          </a:effectRef>
+          <a:fontRef idx="minor">
+            <a:schemeClr val="lt1"/>
+          </a:fontRef>
+        </p:style>
+        <p:txBody>
+          <a:bodyPr rtlCol="0" anchor="ctr"/>
+          <a:lstStyle/>
+          <a:p>
+            <a:pPr algn="ctr"/>
+            <a:r>
+              <a:rPr lang="en-US" sz="1050">
+                <a:solidFill>
+                  <a:schemeClr val="tx1"/>
+                </a:solidFill>
+              </a:rPr>
+              <a:t>Add Deposit</a:t>
+            </a:r>
+          </a:p>
+        </p:txBody>
+      </p:sp>
+      <p:sp>
+        <p:nvSpPr>
+          <p:cNvPr id="6" name="Rounded Rectangle 5">
+            <a:extLst>
+              <a:ext uri="{FF2B5EF4-FFF2-40B4-BE49-F238E27FC236}">
+                <a16:creationId xmlns:a16="http://schemas.microsoft.com/office/drawing/2014/main" id="{765039E9-7FB2-BBBD-2754-17A3F06B2CB7}"/>
+              </a:ext>
+            </a:extLst>
+          </p:cNvPr>
+          <p:cNvSpPr/>
+          <p:nvPr/>
+        </p:nvSpPr>
+        <p:spPr>
+          <a:xfrm>
+            <a:off x="854015" y="3316856"/>
+            <a:ext cx="1164566" cy="284672"/>
+          </a:xfrm>
+          <a:prstGeom prst="roundRect">
+            <a:avLst>
+              <a:gd name="adj" fmla="val 40910"/>
+            </a:avLst>
+          </a:prstGeom>
+          <a:solidFill>
+            <a:schemeClr val="accent1">
+              <a:lumMod val="60000"/>
+              <a:lumOff val="40000"/>
+            </a:schemeClr>
+          </a:solidFill>
+          <a:ln>
+            <a:noFill/>
+          </a:ln>
+        </p:spPr>
+        <p:style>
+          <a:lnRef idx="2">
+            <a:schemeClr val="accent1">
+              <a:shade val="15000"/>
+            </a:schemeClr>
+          </a:lnRef>
+          <a:fillRef idx="1">
+            <a:schemeClr val="accent1"/>
+          </a:fillRef>
+          <a:effectRef idx="0">
+            <a:schemeClr val="accent1"/>
+          </a:effectRef>
+          <a:fontRef idx="minor">
+            <a:schemeClr val="lt1"/>
+          </a:fontRef>
+        </p:style>
+        <p:txBody>
+          <a:bodyPr rtlCol="0" anchor="ctr"/>
+          <a:lstStyle/>
+          <a:p>
+            <a:pPr algn="ctr"/>
+            <a:r>
+              <a:rPr lang="en-US" sz="1050">
+                <a:solidFill>
+                  <a:schemeClr val="tx1"/>
+                </a:solidFill>
+              </a:rPr>
+              <a:t>Add Installment</a:t>
+            </a:r>
+          </a:p>
+        </p:txBody>
+      </p:sp>
+      <p:pic>
+        <p:nvPicPr>
+          <p:cNvPr id="7" name="Picture 6">
+            <a:extLst>
+              <a:ext uri="{FF2B5EF4-FFF2-40B4-BE49-F238E27FC236}">
+                <a16:creationId xmlns:a16="http://schemas.microsoft.com/office/drawing/2014/main" id="{40D37130-1814-C277-BA6B-CE01C2A34B1A}"/>
+              </a:ext>
+            </a:extLst>
+          </p:cNvPr>
+          <p:cNvPicPr>
+            <a:picLocks noChangeAspect="1"/>
+          </p:cNvPicPr>
+          <p:nvPr/>
+        </p:nvPicPr>
+        <p:blipFill>
+          <a:blip r:embed="rId2"/>
+          <a:srcRect b="83376"/>
+          <a:stretch>
+            <a:fillRect/>
+          </a:stretch>
+        </p:blipFill>
+        <p:spPr>
+          <a:xfrm>
+            <a:off x="759125" y="2272461"/>
+            <a:ext cx="7772400" cy="660520"/>
+          </a:xfrm>
+          <a:prstGeom prst="rect">
+            <a:avLst/>
+          </a:prstGeom>
+        </p:spPr>
+      </p:pic>
+    </p:spTree>
+    <p:extLst>
+      <p:ext uri="{BB962C8B-B14F-4D97-AF65-F5344CB8AC3E}">
+        <p14:creationId xmlns:p14="http://schemas.microsoft.com/office/powerpoint/2010/main" val="172939246"/>
+      </p:ext>
+    </p:extLst>
+  </p:cSld>
+  <p:clrMapOvr>
+    <a:masterClrMapping/>
+  </p:clrMapOvr>
+</p:sld>
+</file>
+
+<file path=ppt/slides/slide9.xml><?xml version="1.0" encoding="utf-8"?>
+<p:sld xmlns:a="http://schemas.openxmlformats.org/drawingml/2006/main" xmlns:r="http://schemas.openxmlformats.org/officeDocument/2006/relationships" xmlns:p="http://schemas.openxmlformats.org/presentationml/2006/main">
+  <p:cSld>
+    <p:spTree>
+      <p:nvGrpSpPr>
+        <p:cNvPr id="1" name="">
+          <a:extLst>
+            <a:ext uri="{FF2B5EF4-FFF2-40B4-BE49-F238E27FC236}">
+              <a16:creationId xmlns:a16="http://schemas.microsoft.com/office/drawing/2014/main" id="{FBA6D900-2E82-BA5A-5B21-21A5CCC97CA4}"/>
+            </a:ext>
+          </a:extLst>
+        </p:cNvPr>
+        <p:cNvGrpSpPr/>
+        <p:nvPr/>
+      </p:nvGrpSpPr>
+      <p:grpSpPr>
+        <a:xfrm>
+          <a:off x="0" y="0"/>
+          <a:ext cx="0" cy="0"/>
+          <a:chOff x="0" y="0"/>
+          <a:chExt cx="0" cy="0"/>
+        </a:xfrm>
+      </p:grpSpPr>
+      <p:pic>
+        <p:nvPicPr>
+          <p:cNvPr id="3" name="Picture 2">
+            <a:extLst>
+              <a:ext uri="{FF2B5EF4-FFF2-40B4-BE49-F238E27FC236}">
+                <a16:creationId xmlns:a16="http://schemas.microsoft.com/office/drawing/2014/main" id="{A17107D6-2CB0-7500-4943-C601FC6B6110}"/>
+              </a:ext>
+            </a:extLst>
+          </p:cNvPr>
+          <p:cNvPicPr>
+            <a:picLocks noChangeAspect="1"/>
+          </p:cNvPicPr>
+          <p:nvPr/>
+        </p:nvPicPr>
+        <p:blipFill>
+          <a:blip r:embed="rId2"/>
+          <a:stretch>
+            <a:fillRect/>
+          </a:stretch>
+        </p:blipFill>
+        <p:spPr>
+          <a:xfrm>
+            <a:off x="717550" y="679450"/>
+            <a:ext cx="7772400" cy="3973375"/>
+          </a:xfrm>
+          <a:prstGeom prst="rect">
+            <a:avLst/>
+          </a:prstGeom>
+        </p:spPr>
+      </p:pic>
+      <p:sp>
+        <p:nvSpPr>
+          <p:cNvPr id="4" name="Rectangle 3">
+            <a:extLst>
+              <a:ext uri="{FF2B5EF4-FFF2-40B4-BE49-F238E27FC236}">
+                <a16:creationId xmlns:a16="http://schemas.microsoft.com/office/drawing/2014/main" id="{184857F2-749F-7105-4041-065DD5A54D2A}"/>
+              </a:ext>
+            </a:extLst>
+          </p:cNvPr>
+          <p:cNvSpPr/>
+          <p:nvPr/>
+        </p:nvSpPr>
+        <p:spPr>
+          <a:xfrm>
+            <a:off x="517584" y="431321"/>
+            <a:ext cx="8376249" cy="3191773"/>
+          </a:xfrm>
+          <a:prstGeom prst="rect">
+            <a:avLst/>
+          </a:prstGeom>
+          <a:solidFill>
+            <a:schemeClr val="bg1"/>
+          </a:solidFill>
+          <a:ln>
+            <a:noFill/>
+          </a:ln>
+        </p:spPr>
+        <p:style>
+          <a:lnRef idx="2">
+            <a:schemeClr val="accent1">
+              <a:shade val="15000"/>
+            </a:schemeClr>
+          </a:lnRef>
+          <a:fillRef idx="1">
+            <a:schemeClr val="accent1"/>
+          </a:fillRef>
+          <a:effectRef idx="0">
+            <a:schemeClr val="accent1"/>
+          </a:effectRef>
+          <a:fontRef idx="minor">
+            <a:schemeClr val="lt1"/>
+          </a:fontRef>
+        </p:style>
+        <p:txBody>
+          <a:bodyPr rtlCol="0" anchor="ctr"/>
+          <a:lstStyle/>
+          <a:p>
+            <a:pPr algn="ctr"/>
+            <a:endParaRPr lang="en-US"/>
+          </a:p>
+        </p:txBody>
+      </p:sp>
+      <p:sp>
+        <p:nvSpPr>
+          <p:cNvPr id="6" name="Rounded Rectangle 5">
+            <a:extLst>
+              <a:ext uri="{FF2B5EF4-FFF2-40B4-BE49-F238E27FC236}">
+                <a16:creationId xmlns:a16="http://schemas.microsoft.com/office/drawing/2014/main" id="{8A2CDA18-A72D-7EF1-A6C8-01408A71FD96}"/>
+              </a:ext>
+            </a:extLst>
+          </p:cNvPr>
+          <p:cNvSpPr/>
+          <p:nvPr/>
+        </p:nvSpPr>
+        <p:spPr>
+          <a:xfrm>
+            <a:off x="854015" y="3316856"/>
+            <a:ext cx="1164566" cy="284672"/>
+          </a:xfrm>
+          <a:prstGeom prst="roundRect">
+            <a:avLst>
+              <a:gd name="adj" fmla="val 40910"/>
+            </a:avLst>
+          </a:prstGeom>
+          <a:solidFill>
+            <a:schemeClr val="accent1">
+              <a:lumMod val="60000"/>
+              <a:lumOff val="40000"/>
+            </a:schemeClr>
+          </a:solidFill>
+          <a:ln>
+            <a:noFill/>
+          </a:ln>
+        </p:spPr>
+        <p:style>
+          <a:lnRef idx="2">
+            <a:schemeClr val="accent1">
+              <a:shade val="15000"/>
+            </a:schemeClr>
+          </a:lnRef>
+          <a:fillRef idx="1">
+            <a:schemeClr val="accent1"/>
+          </a:fillRef>
+          <a:effectRef idx="0">
+            <a:schemeClr val="accent1"/>
+          </a:effectRef>
+          <a:fontRef idx="minor">
+            <a:schemeClr val="lt1"/>
+          </a:fontRef>
+        </p:style>
+        <p:txBody>
+          <a:bodyPr rtlCol="0" anchor="ctr"/>
+          <a:lstStyle/>
+          <a:p>
+            <a:pPr algn="ctr"/>
+            <a:r>
+              <a:rPr lang="en-US" sz="1050">
+                <a:solidFill>
+                  <a:schemeClr val="tx1"/>
+                </a:solidFill>
+              </a:rPr>
+              <a:t>Add Installment</a:t>
+            </a:r>
+          </a:p>
+        </p:txBody>
+      </p:sp>
+      <p:pic>
+        <p:nvPicPr>
+          <p:cNvPr id="7" name="Picture 6">
+            <a:extLst>
+              <a:ext uri="{FF2B5EF4-FFF2-40B4-BE49-F238E27FC236}">
+                <a16:creationId xmlns:a16="http://schemas.microsoft.com/office/drawing/2014/main" id="{E2A58CD0-8CF6-17DF-6DBB-A598CDD9913D}"/>
+              </a:ext>
+            </a:extLst>
+          </p:cNvPr>
+          <p:cNvPicPr>
+            <a:picLocks noChangeAspect="1"/>
+          </p:cNvPicPr>
+          <p:nvPr/>
+        </p:nvPicPr>
+        <p:blipFill>
+          <a:blip r:embed="rId2"/>
+          <a:srcRect b="83376"/>
+          <a:stretch>
+            <a:fillRect/>
+          </a:stretch>
+        </p:blipFill>
+        <p:spPr>
+          <a:xfrm>
+            <a:off x="759125" y="2272461"/>
+            <a:ext cx="7772400" cy="660520"/>
+          </a:xfrm>
+          <a:prstGeom prst="rect">
+            <a:avLst/>
+          </a:prstGeom>
+        </p:spPr>
+      </p:pic>
+      <p:sp>
+        <p:nvSpPr>
+          <p:cNvPr id="2" name="TextBox 1">
+            <a:extLst>
+              <a:ext uri="{FF2B5EF4-FFF2-40B4-BE49-F238E27FC236}">
+                <a16:creationId xmlns:a16="http://schemas.microsoft.com/office/drawing/2014/main" id="{65AC8808-BFC8-3D3D-9580-B858F4E4F566}"/>
+              </a:ext>
+            </a:extLst>
+          </p:cNvPr>
+          <p:cNvSpPr txBox="1"/>
+          <p:nvPr/>
+        </p:nvSpPr>
+        <p:spPr>
+          <a:xfrm>
+            <a:off x="776379" y="2950233"/>
+            <a:ext cx="1104181" cy="246221"/>
+          </a:xfrm>
+          <a:prstGeom prst="rect">
+            <a:avLst/>
+          </a:prstGeom>
+          <a:noFill/>
+        </p:spPr>
+        <p:txBody>
+          <a:bodyPr wrap="square" rtlCol="0">
+            <a:spAutoFit/>
+          </a:bodyPr>
+          <a:lstStyle/>
+          <a:p>
+            <a:r>
+              <a:rPr lang="en-US" sz="1000" b="1"/>
+              <a:t>Deposit</a:t>
+            </a:r>
+          </a:p>
+        </p:txBody>
+      </p:sp>
+      <p:pic>
+        <p:nvPicPr>
+          <p:cNvPr id="9" name="Picture 8">
+            <a:extLst>
+              <a:ext uri="{FF2B5EF4-FFF2-40B4-BE49-F238E27FC236}">
+                <a16:creationId xmlns:a16="http://schemas.microsoft.com/office/drawing/2014/main" id="{E2BC2CF0-C4C9-0A43-EFC9-E32EB8BDBE8B}"/>
+              </a:ext>
+            </a:extLst>
+          </p:cNvPr>
+          <p:cNvPicPr>
+            <a:picLocks noChangeAspect="1"/>
+          </p:cNvPicPr>
+          <p:nvPr/>
+        </p:nvPicPr>
+        <p:blipFill>
+          <a:blip r:embed="rId3"/>
+          <a:stretch>
+            <a:fillRect/>
+          </a:stretch>
+        </p:blipFill>
+        <p:spPr>
+          <a:xfrm>
+            <a:off x="2384006" y="2877410"/>
+            <a:ext cx="1164566" cy="456868"/>
+          </a:xfrm>
+          <a:prstGeom prst="rect">
+            <a:avLst/>
+          </a:prstGeom>
+        </p:spPr>
+      </p:pic>
+      <p:pic>
+        <p:nvPicPr>
+          <p:cNvPr id="11" name="Picture 10">
+            <a:extLst>
+              <a:ext uri="{FF2B5EF4-FFF2-40B4-BE49-F238E27FC236}">
+                <a16:creationId xmlns:a16="http://schemas.microsoft.com/office/drawing/2014/main" id="{B38D578B-6678-FE90-2678-BB3703ADFF9E}"/>
+              </a:ext>
+            </a:extLst>
+          </p:cNvPr>
+          <p:cNvPicPr>
+            <a:picLocks noChangeAspect="1"/>
+          </p:cNvPicPr>
+          <p:nvPr/>
+        </p:nvPicPr>
+        <p:blipFill>
+          <a:blip r:embed="rId4"/>
+          <a:stretch>
+            <a:fillRect/>
+          </a:stretch>
+        </p:blipFill>
+        <p:spPr>
+          <a:xfrm>
+            <a:off x="3685037" y="2877410"/>
+            <a:ext cx="897746" cy="425735"/>
+          </a:xfrm>
+          <a:prstGeom prst="rect">
+            <a:avLst/>
+          </a:prstGeom>
+        </p:spPr>
+      </p:pic>
+      <p:pic>
+        <p:nvPicPr>
+          <p:cNvPr id="13" name="Picture 12">
+            <a:extLst>
+              <a:ext uri="{FF2B5EF4-FFF2-40B4-BE49-F238E27FC236}">
+                <a16:creationId xmlns:a16="http://schemas.microsoft.com/office/drawing/2014/main" id="{EB0AA795-ADAA-5DE6-E243-A3C3CDCFB2BB}"/>
+              </a:ext>
+            </a:extLst>
+          </p:cNvPr>
+          <p:cNvPicPr>
+            <a:picLocks noChangeAspect="1"/>
+          </p:cNvPicPr>
+          <p:nvPr/>
+        </p:nvPicPr>
+        <p:blipFill>
+          <a:blip r:embed="rId5"/>
+          <a:stretch>
+            <a:fillRect/>
+          </a:stretch>
+        </p:blipFill>
+        <p:spPr>
+          <a:xfrm>
+            <a:off x="4719248" y="2877410"/>
+            <a:ext cx="1513696" cy="1388855"/>
+          </a:xfrm>
+          <a:prstGeom prst="rect">
+            <a:avLst/>
+          </a:prstGeom>
+        </p:spPr>
+      </p:pic>
+      <p:sp>
+        <p:nvSpPr>
+          <p:cNvPr id="14" name="TextBox 13">
+            <a:extLst>
+              <a:ext uri="{FF2B5EF4-FFF2-40B4-BE49-F238E27FC236}">
+                <a16:creationId xmlns:a16="http://schemas.microsoft.com/office/drawing/2014/main" id="{21BC2078-F018-CC3C-10B0-7F5483FCB3E3}"/>
+              </a:ext>
+            </a:extLst>
+          </p:cNvPr>
+          <p:cNvSpPr txBox="1"/>
+          <p:nvPr/>
+        </p:nvSpPr>
+        <p:spPr>
+          <a:xfrm>
+            <a:off x="7824158" y="2922017"/>
+            <a:ext cx="848504" cy="246221"/>
+          </a:xfrm>
+          <a:prstGeom prst="rect">
+            <a:avLst/>
+          </a:prstGeom>
+          <a:noFill/>
+        </p:spPr>
+        <p:txBody>
+          <a:bodyPr wrap="square" rtlCol="0">
+            <a:spAutoFit/>
+          </a:bodyPr>
+          <a:lstStyle/>
+          <a:p>
+            <a:r>
+              <a:rPr lang="en-US" sz="1000" b="1"/>
+              <a:t>$ 480</a:t>
+            </a:r>
+          </a:p>
+        </p:txBody>
+      </p:sp>
+    </p:spTree>
+    <p:extLst>
+      <p:ext uri="{BB962C8B-B14F-4D97-AF65-F5344CB8AC3E}">
+        <p14:creationId xmlns:p14="http://schemas.microsoft.com/office/powerpoint/2010/main" val="2593888260"/>
+      </p:ext>
+    </p:extLst>
+  </p:cSld>
+  <p:clrMapOvr>
+    <a:masterClrMapping/>
+  </p:clrMapOvr>
+</p:sld>
+</file>
+
 <file path=ppt/theme/theme1.xml><?xml version="1.0" encoding="utf-8"?>
 <a:theme xmlns:a="http://schemas.openxmlformats.org/drawingml/2006/main" name="Office Theme">
   <a:themeElements>
